--- a/DI/DI03/DI_3_INFO1184_Juan_Munoz.pptx
+++ b/DI/DI03/DI_3_INFO1184_Juan_Munoz.pptx
@@ -10235,7 +10235,7 @@
         <p:spPr>
           <a:xfrm>
             <a:off x="566928" y="1591056"/>
-            <a:ext cx="11045952" cy="1133856"/>
+            <a:ext cx="11045952" cy="1316736"/>
           </a:xfrm>
           <a:prstGeom prst="roundRect">
             <a:avLst/>
@@ -10313,7 +10313,7 @@
         <p:spPr>
           <a:xfrm>
             <a:off x="896112" y="2084831"/>
-            <a:ext cx="9857232" cy="256032"/>
+            <a:ext cx="9857232" cy="585216"/>
           </a:xfrm>
           <a:prstGeom prst="rect">
             <a:avLst/>
@@ -10328,13 +10328,13 @@
           <a:p>
             <a:pPr algn="l"/>
             <a:r>
-              <a:rPr sz="2000" b="1" i="0">
+              <a:rPr sz="1600" b="1" i="0">
                 <a:solidFill>
                   <a:srgbClr val="FFFFFF"/>
                 </a:solidFill>
                 <a:latin typeface="Aptos Display"/>
               </a:rPr>
-              <a:t>DBSCAN permite descubrir estructuras densas reales sin fijar k y convierte el ruido en informacion util para el analisis.</a:t>
+              <a:t>En dashboards de Inteligencia de Negocios, DBSCAN ayuda a revelar zonas densas, patrones y anomalias que no siempre son evidentes. Esto permite detectar oportunidades, anticipar riesgos y enfocar decisiones sobre los comportamientos que realmente importan.</a:t>
             </a:r>
           </a:p>
         </p:txBody>
